--- a/Fluctus_Laadplan_Beloeil.pptx
+++ b/Fluctus_Laadplan_Beloeil.pptx
@@ -12830,7 +12830,46 @@
       </p:sp>
       <p:sp>
         <p:nvSpPr>
-          <p:cNvPr id="135" name="Shape 133"/>
+          <p:cNvPr id="135" name="Text 133"/>
+          <p:cNvSpPr/>
+          <p:nvPr/>
+        </p:nvSpPr>
+        <p:spPr>
+          <a:xfrm>
+            <a:off x="640080" y="6071616"/>
+            <a:ext cx="10058400" cy="237744"/>
+          </a:xfrm>
+          <a:prstGeom prst="rect">
+            <a:avLst/>
+          </a:prstGeom>
+          <a:noFill/>
+          <a:ln/>
+        </p:spPr>
+        <p:txBody>
+          <a:bodyPr wrap="square" lIns="0" tIns="0" rIns="0" bIns="0" rtlCol="0" anchor="ctr"/>
+          <a:lstStyle/>
+          <a:p>
+            <a:pPr indent="0" marL="0">
+              <a:buNone/>
+            </a:pPr>
+            <a:r>
+              <a:rPr lang="en-US" sz="800" i="1" dirty="0">
+                <a:solidFill>
+                  <a:srgbClr val="5A6473"/>
+                </a:solidFill>
+                <a:latin typeface="Arial" pitchFamily="34" charset="0"/>
+                <a:ea typeface="Arial" pitchFamily="34" charset="-122"/>
+                <a:cs typeface="Arial" pitchFamily="34" charset="-120"/>
+              </a:rPr>
+              <a:t>Bron bestaande laadpunten: Departement Mobiliteit en Openbare Werken (Vlaanderen).</a:t>
+            </a:r>
+            <a:endParaRPr lang="en-US" sz="800" dirty="0"/>
+          </a:p>
+        </p:txBody>
+      </p:sp>
+      <p:sp>
+        <p:nvSpPr>
+          <p:cNvPr id="136" name="Shape 134"/>
           <p:cNvSpPr/>
           <p:nvPr/>
         </p:nvSpPr>
@@ -12850,7 +12889,7 @@
       </p:sp>
       <p:pic>
         <p:nvPicPr>
-          <p:cNvPr id="136" name="Image 0" descr="preencoded.png">    </p:cNvPr>
+          <p:cNvPr id="137" name="Image 0" descr="preencoded.png">    </p:cNvPr>
           <p:cNvPicPr>
             <a:picLocks noChangeAspect="1"/>
           </p:cNvPicPr>
@@ -12874,7 +12913,7 @@
       </p:pic>
       <p:sp>
         <p:nvSpPr>
-          <p:cNvPr id="137" name="Text 134"/>
+          <p:cNvPr id="138" name="Text 135"/>
           <p:cNvSpPr/>
           <p:nvPr/>
         </p:nvSpPr>
@@ -12916,7 +12955,7 @@
       </p:sp>
       <p:sp>
         <p:nvSpPr>
-          <p:cNvPr id="138" name="Shape 135"/>
+          <p:cNvPr id="139" name="Shape 136"/>
           <p:cNvSpPr/>
           <p:nvPr/>
         </p:nvSpPr>
@@ -12936,7 +12975,7 @@
       </p:sp>
       <p:pic>
         <p:nvPicPr>
-          <p:cNvPr id="139" name="Image 1" descr="preencoded.png">    </p:cNvPr>
+          <p:cNvPr id="140" name="Image 1" descr="preencoded.png">    </p:cNvPr>
           <p:cNvPicPr>
             <a:picLocks noChangeAspect="1"/>
           </p:cNvPicPr>
@@ -12960,7 +12999,7 @@
       </p:pic>
       <p:sp>
         <p:nvSpPr>
-          <p:cNvPr id="140" name="Text 136"/>
+          <p:cNvPr id="141" name="Text 137"/>
           <p:cNvSpPr/>
           <p:nvPr/>
         </p:nvSpPr>
@@ -13002,7 +13041,7 @@
       </p:sp>
       <p:sp>
         <p:nvSpPr>
-          <p:cNvPr id="141" name="Shape 137"/>
+          <p:cNvPr id="142" name="Shape 138"/>
           <p:cNvSpPr/>
           <p:nvPr/>
         </p:nvSpPr>
@@ -13022,7 +13061,7 @@
       </p:sp>
       <p:pic>
         <p:nvPicPr>
-          <p:cNvPr id="142" name="Image 2" descr="preencoded.png">    </p:cNvPr>
+          <p:cNvPr id="143" name="Image 2" descr="preencoded.png">    </p:cNvPr>
           <p:cNvPicPr>
             <a:picLocks noChangeAspect="1"/>
           </p:cNvPicPr>
@@ -13046,7 +13085,7 @@
       </p:pic>
       <p:sp>
         <p:nvSpPr>
-          <p:cNvPr id="143" name="Text 138"/>
+          <p:cNvPr id="144" name="Text 139"/>
           <p:cNvSpPr/>
           <p:nvPr/>
         </p:nvSpPr>
@@ -13088,7 +13127,7 @@
       </p:sp>
       <p:sp>
         <p:nvSpPr>
-          <p:cNvPr id="144" name="Text 139"/>
+          <p:cNvPr id="145" name="Text 140"/>
           <p:cNvSpPr/>
           <p:nvPr/>
         </p:nvSpPr>
@@ -13127,7 +13166,7 @@
       </p:sp>
       <p:sp>
         <p:nvSpPr>
-          <p:cNvPr id="145" name="Text 140"/>
+          <p:cNvPr id="146" name="Text 141"/>
           <p:cNvSpPr/>
           <p:nvPr/>
         </p:nvSpPr>
